--- a/Notes/3_Quantum_TheoryII.pptx
+++ b/Notes/3_Quantum_TheoryII.pptx
@@ -716,7 +716,7 @@
               <a:t>/section-diffraction-through-a-double-slit-</a:t>
             </a:r>
             <a:r>
-              <a:rPr lang="en-US"/>
+              <a:rPr lang="en-US" dirty="0" err="1"/>
               <a:t>light.html</a:t>
             </a:r>
             <a:endParaRPr lang="en-US" dirty="0"/>
@@ -7656,28 +7656,14 @@
                 <a:latin typeface="Times New Roman" panose="02020603050405020304" pitchFamily="18" charset="0"/>
                 <a:cs typeface="Times New Roman" panose="02020603050405020304" pitchFamily="18" charset="0"/>
               </a:rPr>
-              <a:t> which satisfy </a:t>
-            </a:r>
-            <a:r>
-              <a:rPr lang="en-US" sz="2200">
-                <a:latin typeface="Times New Roman" panose="02020603050405020304" pitchFamily="18" charset="0"/>
-                <a:cs typeface="Times New Roman" panose="02020603050405020304" pitchFamily="18" charset="0"/>
-              </a:rPr>
-              <a:t>the </a:t>
-            </a:r>
-            <a:r>
-              <a:rPr lang="en-US" sz="2200" b="1">
-                <a:latin typeface="Times New Roman" panose="02020603050405020304" pitchFamily="18" charset="0"/>
-                <a:cs typeface="Times New Roman" panose="02020603050405020304" pitchFamily="18" charset="0"/>
-              </a:rPr>
-              <a:t>Fraunhofer </a:t>
+              <a:t> which satisfy the </a:t>
             </a:r>
             <a:r>
               <a:rPr lang="en-US" sz="2200" b="1" dirty="0">
                 <a:latin typeface="Times New Roman" panose="02020603050405020304" pitchFamily="18" charset="0"/>
                 <a:cs typeface="Times New Roman" panose="02020603050405020304" pitchFamily="18" charset="0"/>
               </a:rPr>
-              <a:t>equation</a:t>
+              <a:t>Fraunhofer equation</a:t>
             </a:r>
             <a:r>
               <a:rPr lang="en-US" sz="2200" dirty="0">
